--- a/Planning docs/Slides/lesson-8-3-teacher-slides.pptx
+++ b/Planning docs/Slides/lesson-8-3-teacher-slides.pptx
@@ -4813,7 +4813,7 @@
                 <a:ea typeface="Calibri" pitchFamily="34" charset="-122"/>
                 <a:cs typeface="Calibri" pitchFamily="34" charset="-120"/>
               </a:rPr>
-              <a:t>•  How do different characters react to Despereaux?</a:t>
+              <a:t>•  The princess calls Despereaux “sweet” and “tiny.” Why do the princess and king see him so differently?</a:t>
             </a:r>
             <a:endParaRPr lang="en-US" sz="1500" dirty="0"/>
           </a:p>
@@ -4830,24 +4830,7 @@
                 <a:ea typeface="Calibri" pitchFamily="34" charset="-122"/>
                 <a:cs typeface="Calibri" pitchFamily="34" charset="-120"/>
               </a:rPr>
-              <a:t>•  Why does the princess see Despereaux differently than his family does?</a:t>
-            </a:r>
-            <a:endParaRPr lang="en-US" sz="1500" dirty="0"/>
-          </a:p>
-          <a:p>
-            <a:pPr indent="0" marL="0">
-              <a:buNone/>
-            </a:pPr>
-            <a:r>
-              <a:rPr lang="en-US" sz="1500" dirty="0">
-                <a:solidFill>
-                  <a:srgbClr val="1E293B"/>
-                </a:solidFill>
-                <a:latin typeface="Calibri" pitchFamily="34" charset="0"/>
-                <a:ea typeface="Calibri" pitchFamily="34" charset="-122"/>
-                <a:cs typeface="Calibri" pitchFamily="34" charset="-120"/>
-              </a:rPr>
-              <a:t>•  What problem is building by the end of Chapter 7?</a:t>
+              <a:t>•  Furlough sees Despereaux with the princess and shouts “He’s nuts!” Is Despereaux being brave or foolish? Explain.</a:t>
             </a:r>
             <a:endParaRPr lang="en-US" sz="1500" dirty="0"/>
           </a:p>
